--- a/project-plan/StatusReports2/DealerOps Status Report 2 - Sprint 1 - Group 2.pptx
+++ b/project-plan/StatusReports2/DealerOps Status Report 2 - Sprint 1 - Group 2.pptx
@@ -123,19 +123,19 @@
   <p:extLst>
     <p:ext uri="{521415D9-36F7-43E2-AB2F-B90AF26B5E84}">
       <p14:sectionLst xmlns:p14="http://schemas.microsoft.com/office/powerpoint/2010/main">
-        <p14:section name="Opening" id="{0e9fb50d-4eb3-4b4e-a9b2-cf73c86edc55}">
+        <p14:section name="Opening" id="{f8a41403-eb95-721d-05b1-a36ae22f5239}">
           <p14:sldIdLst>
             <p14:sldId id="256"/>
           </p14:sldIdLst>
         </p14:section>
-        <p14:section name="Progress" id="{fd7ca6ea-5f07-fad6-5723-4a771ce95abd}">
+        <p14:section name="Progress" id="{d7655ece-cc28-67ff-f519-315f6a98e484}">
           <p14:sldIdLst>
             <p14:sldId id="257"/>
             <p14:sldId id="258"/>
             <p14:sldId id="259"/>
           </p14:sldIdLst>
         </p14:section>
-        <p14:section name="Architecture" id="{839973b6-a850-90ea-8c17-02c94060646d}">
+        <p14:section name="Architecture" id="{9160caaf-f154-9279-7731-8ef3d0548aae}">
           <p14:sldIdLst>
             <p14:sldId id="260"/>
             <p14:sldId id="261"/>
@@ -146,14 +146,14 @@
             <p14:sldId id="266"/>
           </p14:sldIdLst>
         </p14:section>
-        <p14:section name="Milestones" id="{ddd73604-f79d-cf47-8c02-f5875b11a6e8}">
+        <p14:section name="Milestones" id="{a956a9dd-2e78-dc99-2f58-24ee9515da32}">
           <p14:sldIdLst>
             <p14:sldId id="267"/>
             <p14:sldId id="268"/>
             <p14:sldId id="269"/>
           </p14:sldIdLst>
         </p14:section>
-        <p14:section name="Demo and next" id="{ad5347ad-e4c1-98a4-47a3-0cafc65c56ca}">
+        <p14:section name="Demo and next" id="{f855f8f5-2c19-18d3-ec03-2d121ffb1918}">
           <p14:sldIdLst>
             <p14:sldId id="270"/>
             <p14:sldId id="271"/>
@@ -7472,7 +7472,7 @@
                             <a:srgbClr val="0F1F2E"/>
                           </a:solidFill>
                         </a:rPr>
-                        <a:t>Live two-dealership demo on the deployed environment</a:t>
+                        <a:t>Live demo on the deployed environment</a:t>
                       </a:r>
                       <a:endParaRPr lang="en-US" sz="1100" dirty="0"/>
                     </a:p>
@@ -7594,7 +7594,7 @@
                             <a:srgbClr val="0F1F2E"/>
                           </a:solidFill>
                         </a:rPr>
-                        <a:t>Rehearsal scheduled before the class demo</a:t>
+                        <a:t>Done early — demonstrated to the instructor on 21 October, who confirmed the demonstrated scope</a:t>
                       </a:r>
                       <a:endParaRPr lang="en-US" sz="1100" dirty="0"/>
                     </a:p>
@@ -8377,7 +8377,7 @@
                   <a:schemeClr val="accent5"/>
                 </a:solidFill>
               </a:rPr>
-              <a:t>Six acceptance scripts, run on two dealerships with real demo data. Feature code is complete, so this is a finished build rather than a partial prototype.</a:t>
+              <a:t>Six acceptance scripts, run on two dealerships with real demo data. The build already ran on the deployed Azure environment for the instructor on 21 October; this is a finished build, not a partial prototype.</a:t>
             </a:r>
             <a:endParaRPr lang="en-US" sz="1350" dirty="0"/>
           </a:p>
@@ -9949,7 +9949,7 @@
                   <a:srgbClr val="FFFFFF"/>
                 </a:solidFill>
               </a:rPr>
-              <a:t>Research log and AI log published; scope baseline and NN-05 confirmed.</a:t>
+              <a:t>Research log and AI log published on the team site, and the research log actually filled.</a:t>
             </a:r>
             <a:endParaRPr lang="en-US" sz="1150" dirty="0"/>
           </a:p>
@@ -9970,7 +9970,7 @@
                   <a:srgbClr val="FFFFFF"/>
                 </a:solidFill>
               </a:rPr>
-              <a:t>Live demo rehearsed on the deployed environment with the two-dealership data set.</a:t>
+              <a:t>Written instructor acknowledgement of the scope baseline and the NN-05 hosting decision; the 21 October confirmation was verbal.</a:t>
             </a:r>
             <a:endParaRPr lang="en-US" sz="1150" dirty="0"/>
           </a:p>
